--- a/topic-00-assessment/unit-1/paneltalk-schedule/ass-schedule.pptx
+++ b/topic-00-assessment/unit-1/paneltalk-schedule/ass-schedule.pptx
@@ -104,6 +104,11 @@
       </a:defRPr>
     </a:lvl9pPr>
   </p:defaultTextStyle>
+  <p:extLst>
+    <p:ext uri="{EFAFB233-063F-42B5-8137-9DF3F51BA10A}">
+      <p15:sldGuideLst xmlns:p15="http://schemas.microsoft.com/office/powerpoint/2012/main"/>
+    </p:ext>
+  </p:extLst>
 </p:presentation>
 </file>
 
@@ -256,7 +261,7 @@
           <a:p>
             <a:fld id="{7255EE40-3CAD-7547-83FB-B1B5426D41EB}" type="datetimeFigureOut">
               <a:rPr lang="en-US" smtClean="0"/>
-              <a:t>9/30/25</a:t>
+              <a:t>11/7/25</a:t>
             </a:fld>
             <a:endParaRPr lang="en-US"/>
           </a:p>
@@ -456,7 +461,7 @@
           <a:p>
             <a:fld id="{7255EE40-3CAD-7547-83FB-B1B5426D41EB}" type="datetimeFigureOut">
               <a:rPr lang="en-US" smtClean="0"/>
-              <a:t>9/30/25</a:t>
+              <a:t>11/7/25</a:t>
             </a:fld>
             <a:endParaRPr lang="en-US"/>
           </a:p>
@@ -666,7 +671,7 @@
           <a:p>
             <a:fld id="{7255EE40-3CAD-7547-83FB-B1B5426D41EB}" type="datetimeFigureOut">
               <a:rPr lang="en-US" smtClean="0"/>
-              <a:t>9/30/25</a:t>
+              <a:t>11/7/25</a:t>
             </a:fld>
             <a:endParaRPr lang="en-US"/>
           </a:p>
@@ -866,7 +871,7 @@
           <a:p>
             <a:fld id="{7255EE40-3CAD-7547-83FB-B1B5426D41EB}" type="datetimeFigureOut">
               <a:rPr lang="en-US" smtClean="0"/>
-              <a:t>9/30/25</a:t>
+              <a:t>11/7/25</a:t>
             </a:fld>
             <a:endParaRPr lang="en-US"/>
           </a:p>
@@ -1142,7 +1147,7 @@
           <a:p>
             <a:fld id="{7255EE40-3CAD-7547-83FB-B1B5426D41EB}" type="datetimeFigureOut">
               <a:rPr lang="en-US" smtClean="0"/>
-              <a:t>9/30/25</a:t>
+              <a:t>11/7/25</a:t>
             </a:fld>
             <a:endParaRPr lang="en-US"/>
           </a:p>
@@ -1410,7 +1415,7 @@
           <a:p>
             <a:fld id="{7255EE40-3CAD-7547-83FB-B1B5426D41EB}" type="datetimeFigureOut">
               <a:rPr lang="en-US" smtClean="0"/>
-              <a:t>9/30/25</a:t>
+              <a:t>11/7/25</a:t>
             </a:fld>
             <a:endParaRPr lang="en-US"/>
           </a:p>
@@ -1825,7 +1830,7 @@
           <a:p>
             <a:fld id="{7255EE40-3CAD-7547-83FB-B1B5426D41EB}" type="datetimeFigureOut">
               <a:rPr lang="en-US" smtClean="0"/>
-              <a:t>9/30/25</a:t>
+              <a:t>11/7/25</a:t>
             </a:fld>
             <a:endParaRPr lang="en-US"/>
           </a:p>
@@ -1967,7 +1972,7 @@
           <a:p>
             <a:fld id="{7255EE40-3CAD-7547-83FB-B1B5426D41EB}" type="datetimeFigureOut">
               <a:rPr lang="en-US" smtClean="0"/>
-              <a:t>9/30/25</a:t>
+              <a:t>11/7/25</a:t>
             </a:fld>
             <a:endParaRPr lang="en-US"/>
           </a:p>
@@ -2080,7 +2085,7 @@
           <a:p>
             <a:fld id="{7255EE40-3CAD-7547-83FB-B1B5426D41EB}" type="datetimeFigureOut">
               <a:rPr lang="en-US" smtClean="0"/>
-              <a:t>9/30/25</a:t>
+              <a:t>11/7/25</a:t>
             </a:fld>
             <a:endParaRPr lang="en-US"/>
           </a:p>
@@ -2393,7 +2398,7 @@
           <a:p>
             <a:fld id="{7255EE40-3CAD-7547-83FB-B1B5426D41EB}" type="datetimeFigureOut">
               <a:rPr lang="en-US" smtClean="0"/>
-              <a:t>9/30/25</a:t>
+              <a:t>11/7/25</a:t>
             </a:fld>
             <a:endParaRPr lang="en-US"/>
           </a:p>
@@ -2682,7 +2687,7 @@
           <a:p>
             <a:fld id="{7255EE40-3CAD-7547-83FB-B1B5426D41EB}" type="datetimeFigureOut">
               <a:rPr lang="en-US" smtClean="0"/>
-              <a:t>9/30/25</a:t>
+              <a:t>11/7/25</a:t>
             </a:fld>
             <a:endParaRPr lang="en-US"/>
           </a:p>
@@ -2925,7 +2930,7 @@
           <a:p>
             <a:fld id="{7255EE40-3CAD-7547-83FB-B1B5426D41EB}" type="datetimeFigureOut">
               <a:rPr lang="en-US" smtClean="0"/>
-              <a:t>9/30/25</a:t>
+              <a:t>11/7/25</a:t>
             </a:fld>
             <a:endParaRPr lang="en-US"/>
           </a:p>
@@ -3344,10 +3349,10 @@
       </p:grpSpPr>
       <p:pic>
         <p:nvPicPr>
-          <p:cNvPr id="5" name="Picture 4" descr="A table with a schedule&#10;&#10;AI-generated content may be incorrect.">
-            <a:extLst>
-              <a:ext uri="{FF2B5EF4-FFF2-40B4-BE49-F238E27FC236}">
-                <a16:creationId xmlns:a16="http://schemas.microsoft.com/office/drawing/2014/main" id="{421A47F0-BF5C-0819-E9FD-E3FE0677836C}"/>
+          <p:cNvPr id="3" name="Picture 2" descr="A table with a schedule&#10;&#10;AI-generated content may be incorrect.">
+            <a:extLst>
+              <a:ext uri="{FF2B5EF4-FFF2-40B4-BE49-F238E27FC236}">
+                <a16:creationId xmlns:a16="http://schemas.microsoft.com/office/drawing/2014/main" id="{79255DF7-B93C-E3C8-455F-8990EA0211D7}"/>
               </a:ext>
             </a:extLst>
           </p:cNvPr>
@@ -3364,8 +3369,8 @@
         </p:blipFill>
         <p:spPr>
           <a:xfrm>
-            <a:off x="-84489" y="1322800"/>
-            <a:ext cx="12360978" cy="4212400"/>
+            <a:off x="0" y="1031257"/>
+            <a:ext cx="12192000" cy="4839923"/>
           </a:xfrm>
           <a:prstGeom prst="rect">
             <a:avLst/>

--- a/topic-00-assessment/unit-1/paneltalk-schedule/ass-schedule.pptx
+++ b/topic-00-assessment/unit-1/paneltalk-schedule/ass-schedule.pptx
@@ -3349,10 +3349,10 @@
       </p:grpSpPr>
       <p:pic>
         <p:nvPicPr>
-          <p:cNvPr id="3" name="Picture 2" descr="A table with a schedule&#10;&#10;AI-generated content may be incorrect.">
-            <a:extLst>
-              <a:ext uri="{FF2B5EF4-FFF2-40B4-BE49-F238E27FC236}">
-                <a16:creationId xmlns:a16="http://schemas.microsoft.com/office/drawing/2014/main" id="{79255DF7-B93C-E3C8-455F-8990EA0211D7}"/>
+          <p:cNvPr id="4" name="Picture 3" descr="A table with text and numbers&#10;&#10;AI-generated content may be incorrect.">
+            <a:extLst>
+              <a:ext uri="{FF2B5EF4-FFF2-40B4-BE49-F238E27FC236}">
+                <a16:creationId xmlns:a16="http://schemas.microsoft.com/office/drawing/2014/main" id="{C45B32C0-8217-8E18-7025-451F664B702C}"/>
               </a:ext>
             </a:extLst>
           </p:cNvPr>
@@ -3369,8 +3369,8 @@
         </p:blipFill>
         <p:spPr>
           <a:xfrm>
-            <a:off x="0" y="1031257"/>
-            <a:ext cx="12192000" cy="4839923"/>
+            <a:off x="0" y="1302543"/>
+            <a:ext cx="12058650" cy="4500960"/>
           </a:xfrm>
           <a:prstGeom prst="rect">
             <a:avLst/>
